--- a/システム構成_サーバサイジング_20260915.pptx
+++ b/システム構成_サーバサイジング_20260915.pptx
@@ -6,6 +6,7 @@
   </p:sldMasterIdLst>
   <p:sldIdLst>
     <p:sldId id="256" r:id="rId7"/>
+    <p:sldId id="257" r:id="rId8"/>
   </p:sldIdLst>
   <p:sldSz cx="12191695" cy="6858000" type="screen4x3"/>
   <p:notesSz cx="6858000" cy="9144000"/>
@@ -3112,7 +3113,7 @@
           <a:p>
             <a:pPr algn="l"/>
             <a:r>
-              <a:rPr sz="2600" b="0">
+              <a:rPr sz="2600">
                 <a:solidFill>
                   <a:srgbClr val="1B3A4B"/>
                 </a:solidFill>
@@ -3191,7 +3192,7 @@
           <a:p>
             <a:pPr algn="l"/>
             <a:r>
-              <a:rPr sz="1300" b="0">
+              <a:rPr sz="1300">
                 <a:solidFill>
                   <a:srgbClr val="1B3A4B"/>
                 </a:solidFill>
@@ -3211,7 +3212,7 @@
           <p:nvPr/>
         </p:nvGraphicFramePr>
         <p:xfrm>
-          <a:off x="457200" y="1261872"/>
+          <a:off x="457200" y="1280160"/>
           <a:ext cx="11384280" cy="1847088"/>
         </p:xfrm>
         <a:graphic>
@@ -3222,12 +3223,12 @@
               </a:tblPr>
               <a:tblGrid>
                 <a:gridCol w="960120"/>
-                <a:gridCol w="1481328"/>
-                <a:gridCol w="1481328"/>
-                <a:gridCol w="1572768"/>
-                <a:gridCol w="1572768"/>
-                <a:gridCol w="2157984"/>
-                <a:gridCol w="2157984"/>
+                <a:gridCol w="1536192"/>
+                <a:gridCol w="1536192"/>
+                <a:gridCol w="1536192"/>
+                <a:gridCol w="1417320"/>
+                <a:gridCol w="2194560"/>
+                <a:gridCol w="2203704"/>
               </a:tblGrid>
               <a:tr h="566928">
                 <a:tc>
@@ -3237,7 +3238,7 @@
                     <a:p>
                       <a:pPr algn="ctr"/>
                       <a:r>
-                        <a:rPr sz="1050" b="0">
+                        <a:rPr sz="1050">
                           <a:solidFill>
                             <a:srgbClr val="FFFFFF"/>
                           </a:solidFill>
@@ -3249,7 +3250,7 @@
                     <a:p>
                       <a:pPr algn="ctr"/>
                       <a:r>
-                        <a:rPr sz="800" b="0">
+                        <a:rPr sz="800">
                           <a:solidFill>
                             <a:srgbClr val="FFFFFF"/>
                           </a:solidFill>
@@ -3272,7 +3273,7 @@
                     <a:p>
                       <a:pPr algn="ctr"/>
                       <a:r>
-                        <a:rPr sz="1050" b="0">
+                        <a:rPr sz="1050">
                           <a:solidFill>
                             <a:srgbClr val="FFFFFF"/>
                           </a:solidFill>
@@ -3284,7 +3285,7 @@
                     <a:p>
                       <a:pPr algn="ctr"/>
                       <a:r>
-                        <a:rPr sz="800" b="0">
+                        <a:rPr sz="800">
                           <a:solidFill>
                             <a:srgbClr val="FFFFFF"/>
                           </a:solidFill>
@@ -3307,7 +3308,7 @@
                     <a:p>
                       <a:pPr algn="ctr"/>
                       <a:r>
-                        <a:rPr sz="1050" b="0">
+                        <a:rPr sz="1050">
                           <a:solidFill>
                             <a:srgbClr val="FFFFFF"/>
                           </a:solidFill>
@@ -3319,7 +3320,7 @@
                     <a:p>
                       <a:pPr algn="ctr"/>
                       <a:r>
-                        <a:rPr sz="800" b="0">
+                        <a:rPr sz="800">
                           <a:solidFill>
                             <a:srgbClr val="FFFFFF"/>
                           </a:solidFill>
@@ -3342,25 +3343,25 @@
                     <a:p>
                       <a:pPr algn="ctr"/>
                       <a:r>
-                        <a:rPr sz="1050" b="0">
+                        <a:rPr sz="1050">
                           <a:solidFill>
                             <a:srgbClr val="FFFFFF"/>
                           </a:solidFill>
                           <a:latin typeface="メイリオ"/>
                         </a:rPr>
-                        <a:t>ピーク日</a:t>
+                        <a:t>時間平均</a:t>
                       </a:r>
                     </a:p>
                     <a:p>
                       <a:pPr algn="ctr"/>
                       <a:r>
-                        <a:rPr sz="800" b="0">
+                        <a:rPr sz="800">
                           <a:solidFill>
                             <a:srgbClr val="FFFFFF"/>
                           </a:solidFill>
                           <a:latin typeface="メイリオ"/>
                         </a:rPr>
-                        <a:t>（件/日）</a:t>
+                        <a:t>（件/時）</a:t>
                       </a:r>
                     </a:p>
                   </a:txBody>
@@ -3377,25 +3378,25 @@
                     <a:p>
                       <a:pPr algn="ctr"/>
                       <a:r>
-                        <a:rPr sz="1050" b="0">
+                        <a:rPr sz="1050">
                           <a:solidFill>
                             <a:srgbClr val="FFFFFF"/>
                           </a:solidFill>
                           <a:latin typeface="メイリオ"/>
                         </a:rPr>
-                        <a:t>ピーク時</a:t>
+                        <a:t>分平均</a:t>
                       </a:r>
                     </a:p>
                     <a:p>
                       <a:pPr algn="ctr"/>
                       <a:r>
-                        <a:rPr sz="800" b="0">
+                        <a:rPr sz="800">
                           <a:solidFill>
                             <a:srgbClr val="FFFFFF"/>
                           </a:solidFill>
                           <a:latin typeface="メイリオ"/>
                         </a:rPr>
-                        <a:t>（件/時）</a:t>
+                        <a:t>（件/分）</a:t>
                       </a:r>
                     </a:p>
                   </a:txBody>
@@ -3412,7 +3413,7 @@
                     <a:p>
                       <a:pPr algn="ctr"/>
                       <a:r>
-                        <a:rPr sz="1050" b="0">
+                        <a:rPr sz="1050">
                           <a:solidFill>
                             <a:srgbClr val="FFFFFF"/>
                           </a:solidFill>
@@ -3424,7 +3425,7 @@
                     <a:p>
                       <a:pPr algn="ctr"/>
                       <a:r>
-                        <a:rPr sz="800" b="0">
+                        <a:rPr sz="800">
                           <a:solidFill>
                             <a:srgbClr val="FFFFFF"/>
                           </a:solidFill>
@@ -3447,7 +3448,7 @@
                     <a:p>
                       <a:pPr algn="ctr"/>
                       <a:r>
-                        <a:rPr sz="1050" b="0">
+                        <a:rPr sz="1050">
                           <a:solidFill>
                             <a:srgbClr val="FFFFFF"/>
                           </a:solidFill>
@@ -3459,7 +3460,7 @@
                     <a:p>
                       <a:pPr algn="ctr"/>
                       <a:r>
-                        <a:rPr sz="800" b="0">
+                        <a:rPr sz="800">
                           <a:solidFill>
                             <a:srgbClr val="FFFFFF"/>
                           </a:solidFill>
@@ -3484,7 +3485,7 @@
                     <a:p>
                       <a:pPr algn="l"/>
                       <a:r>
-                        <a:rPr sz="1100" b="0">
+                        <a:rPr sz="1100">
                           <a:solidFill>
                             <a:srgbClr val="1B3A4B"/>
                           </a:solidFill>
@@ -3507,7 +3508,7 @@
                     <a:p>
                       <a:pPr algn="r"/>
                       <a:r>
-                        <a:rPr sz="1100" b="0">
+                        <a:rPr sz="1100">
                           <a:solidFill>
                             <a:srgbClr val="1B3A4B"/>
                           </a:solidFill>
@@ -3530,13 +3531,59 @@
                     <a:p>
                       <a:pPr algn="r"/>
                       <a:r>
-                        <a:rPr sz="1100" b="0">
+                        <a:rPr sz="1100">
+                          <a:solidFill>
+                            <a:srgbClr val="1B3A4B"/>
+                          </a:solidFill>
+                          <a:latin typeface="メイリオ"/>
+                        </a:rPr>
+                        <a:t>974</a:t>
+                      </a:r>
+                    </a:p>
+                  </a:txBody>
+                  <a:tcPr marL="45720" marR="45720" marT="18288" marB="18288" anchor="ctr">
+                    <a:solidFill>
+                      <a:srgbClr val="FFFFFF"/>
+                    </a:solidFill>
+                  </a:tcPr>
+                </a:tc>
+                <a:tc>
+                  <a:txBody>
+                    <a:bodyPr wrap="square"/>
+                    <a:lstStyle/>
+                    <a:p>
+                      <a:pPr algn="r"/>
+                      <a:r>
+                        <a:rPr sz="1100">
+                          <a:solidFill>
+                            <a:srgbClr val="1B3A4B"/>
+                          </a:solidFill>
+                          <a:latin typeface="メイリオ"/>
+                        </a:rPr>
+                        <a:t>122</a:t>
+                      </a:r>
+                    </a:p>
+                  </a:txBody>
+                  <a:tcPr marL="45720" marR="45720" marT="18288" marB="18288" anchor="ctr">
+                    <a:solidFill>
+                      <a:srgbClr val="FFFFFF"/>
+                    </a:solidFill>
+                  </a:tcPr>
+                </a:tc>
+                <a:tc>
+                  <a:txBody>
+                    <a:bodyPr wrap="square"/>
+                    <a:lstStyle/>
+                    <a:p>
+                      <a:pPr algn="r"/>
+                      <a:r>
+                        <a:rPr sz="1100">
                           <a:solidFill>
                             <a:srgbClr val="5C6770"/>
                           </a:solidFill>
                           <a:latin typeface="メイリオ"/>
                         </a:rPr>
-                        <a:t>974</a:t>
+                        <a:t>2.0</a:t>
                       </a:r>
                     </a:p>
                   </a:txBody>
@@ -3553,13 +3600,13 @@
                     <a:p>
                       <a:pPr algn="r"/>
                       <a:r>
-                        <a:rPr sz="1100" b="0">
-                          <a:solidFill>
-                            <a:srgbClr val="1B3A4B"/>
-                          </a:solidFill>
-                          <a:latin typeface="メイリオ"/>
-                        </a:rPr>
-                        <a:t>1,949</a:t>
+                        <a:rPr sz="1200">
+                          <a:solidFill>
+                            <a:srgbClr val="2B4060"/>
+                          </a:solidFill>
+                          <a:latin typeface="メイリオ"/>
+                        </a:rPr>
+                        <a:t>21</a:t>
                       </a:r>
                     </a:p>
                   </a:txBody>
@@ -3576,59 +3623,13 @@
                     <a:p>
                       <a:pPr algn="r"/>
                       <a:r>
-                        <a:rPr sz="1100" b="0">
-                          <a:solidFill>
-                            <a:srgbClr val="1B3A4B"/>
-                          </a:solidFill>
-                          <a:latin typeface="メイリオ"/>
-                        </a:rPr>
-                        <a:t>609</a:t>
-                      </a:r>
-                    </a:p>
-                  </a:txBody>
-                  <a:tcPr marL="45720" marR="45720" marT="18288" marB="18288" anchor="ctr">
-                    <a:solidFill>
-                      <a:srgbClr val="FFFFFF"/>
-                    </a:solidFill>
-                  </a:tcPr>
-                </a:tc>
-                <a:tc>
-                  <a:txBody>
-                    <a:bodyPr wrap="square"/>
-                    <a:lstStyle/>
-                    <a:p>
-                      <a:pPr algn="r"/>
-                      <a:r>
-                        <a:rPr sz="1200" b="0">
-                          <a:solidFill>
-                            <a:srgbClr val="2B4060"/>
-                          </a:solidFill>
-                          <a:latin typeface="メイリオ"/>
-                        </a:rPr>
-                        <a:t>153</a:t>
-                      </a:r>
-                    </a:p>
-                  </a:txBody>
-                  <a:tcPr marL="45720" marR="45720" marT="18288" marB="18288" anchor="ctr">
-                    <a:solidFill>
-                      <a:srgbClr val="FFFFFF"/>
-                    </a:solidFill>
-                  </a:tcPr>
-                </a:tc>
-                <a:tc>
-                  <a:txBody>
-                    <a:bodyPr wrap="square"/>
-                    <a:lstStyle/>
-                    <a:p>
-                      <a:pPr algn="r"/>
-                      <a:r>
-                        <a:rPr sz="1300" b="0">
+                        <a:rPr sz="1200">
                           <a:solidFill>
                             <a:srgbClr val="1D7A70"/>
                           </a:solidFill>
                           <a:latin typeface="メイリオ"/>
                         </a:rPr>
-                        <a:t>3</a:t>
+                        <a:t>0.07</a:t>
                       </a:r>
                     </a:p>
                   </a:txBody>
@@ -3647,7 +3648,7 @@
                     <a:p>
                       <a:pPr algn="l"/>
                       <a:r>
-                        <a:rPr sz="1100" b="0">
+                        <a:rPr sz="1100">
                           <a:solidFill>
                             <a:srgbClr val="1B3A4B"/>
                           </a:solidFill>
@@ -3670,7 +3671,7 @@
                     <a:p>
                       <a:pPr algn="r"/>
                       <a:r>
-                        <a:rPr sz="1100" b="0">
+                        <a:rPr sz="1100">
                           <a:solidFill>
                             <a:srgbClr val="1B3A4B"/>
                           </a:solidFill>
@@ -3693,13 +3694,59 @@
                     <a:p>
                       <a:pPr algn="r"/>
                       <a:r>
-                        <a:rPr sz="1100" b="0">
+                        <a:rPr sz="1100">
+                          <a:solidFill>
+                            <a:srgbClr val="1B3A4B"/>
+                          </a:solidFill>
+                          <a:latin typeface="メイリオ"/>
+                        </a:rPr>
+                        <a:t>1,169</a:t>
+                      </a:r>
+                    </a:p>
+                  </a:txBody>
+                  <a:tcPr marL="45720" marR="45720" marT="18288" marB="18288" anchor="ctr">
+                    <a:solidFill>
+                      <a:srgbClr val="F4F7FB"/>
+                    </a:solidFill>
+                  </a:tcPr>
+                </a:tc>
+                <a:tc>
+                  <a:txBody>
+                    <a:bodyPr wrap="square"/>
+                    <a:lstStyle/>
+                    <a:p>
+                      <a:pPr algn="r"/>
+                      <a:r>
+                        <a:rPr sz="1100">
+                          <a:solidFill>
+                            <a:srgbClr val="1B3A4B"/>
+                          </a:solidFill>
+                          <a:latin typeface="メイリオ"/>
+                        </a:rPr>
+                        <a:t>146</a:t>
+                      </a:r>
+                    </a:p>
+                  </a:txBody>
+                  <a:tcPr marL="45720" marR="45720" marT="18288" marB="18288" anchor="ctr">
+                    <a:solidFill>
+                      <a:srgbClr val="F4F7FB"/>
+                    </a:solidFill>
+                  </a:tcPr>
+                </a:tc>
+                <a:tc>
+                  <a:txBody>
+                    <a:bodyPr wrap="square"/>
+                    <a:lstStyle/>
+                    <a:p>
+                      <a:pPr algn="r"/>
+                      <a:r>
+                        <a:rPr sz="1100">
                           <a:solidFill>
                             <a:srgbClr val="5C6770"/>
                           </a:solidFill>
                           <a:latin typeface="メイリオ"/>
                         </a:rPr>
-                        <a:t>1,169</a:t>
+                        <a:t>2.4</a:t>
                       </a:r>
                     </a:p>
                   </a:txBody>
@@ -3716,13 +3763,13 @@
                     <a:p>
                       <a:pPr algn="r"/>
                       <a:r>
-                        <a:rPr sz="1100" b="0">
-                          <a:solidFill>
-                            <a:srgbClr val="1B3A4B"/>
-                          </a:solidFill>
-                          <a:latin typeface="メイリオ"/>
-                        </a:rPr>
-                        <a:t>2,339</a:t>
+                        <a:rPr sz="1200">
+                          <a:solidFill>
+                            <a:srgbClr val="2B4060"/>
+                          </a:solidFill>
+                          <a:latin typeface="メイリオ"/>
+                        </a:rPr>
+                        <a:t>25</a:t>
                       </a:r>
                     </a:p>
                   </a:txBody>
@@ -3739,59 +3786,13 @@
                     <a:p>
                       <a:pPr algn="r"/>
                       <a:r>
-                        <a:rPr sz="1100" b="0">
-                          <a:solidFill>
-                            <a:srgbClr val="1B3A4B"/>
-                          </a:solidFill>
-                          <a:latin typeface="メイリオ"/>
-                        </a:rPr>
-                        <a:t>731</a:t>
-                      </a:r>
-                    </a:p>
-                  </a:txBody>
-                  <a:tcPr marL="45720" marR="45720" marT="18288" marB="18288" anchor="ctr">
-                    <a:solidFill>
-                      <a:srgbClr val="F4F7FB"/>
-                    </a:solidFill>
-                  </a:tcPr>
-                </a:tc>
-                <a:tc>
-                  <a:txBody>
-                    <a:bodyPr wrap="square"/>
-                    <a:lstStyle/>
-                    <a:p>
-                      <a:pPr algn="r"/>
-                      <a:r>
-                        <a:rPr sz="1200" b="0">
-                          <a:solidFill>
-                            <a:srgbClr val="2B4060"/>
-                          </a:solidFill>
-                          <a:latin typeface="メイリオ"/>
-                        </a:rPr>
-                        <a:t>183</a:t>
-                      </a:r>
-                    </a:p>
-                  </a:txBody>
-                  <a:tcPr marL="45720" marR="45720" marT="18288" marB="18288" anchor="ctr">
-                    <a:solidFill>
-                      <a:srgbClr val="F4F7FB"/>
-                    </a:solidFill>
-                  </a:tcPr>
-                </a:tc>
-                <a:tc>
-                  <a:txBody>
-                    <a:bodyPr wrap="square"/>
-                    <a:lstStyle/>
-                    <a:p>
-                      <a:pPr algn="r"/>
-                      <a:r>
-                        <a:rPr sz="1300" b="0">
+                        <a:rPr sz="1200">
                           <a:solidFill>
                             <a:srgbClr val="1D7A70"/>
                           </a:solidFill>
                           <a:latin typeface="メイリオ"/>
                         </a:rPr>
-                        <a:t>3</a:t>
+                        <a:t>0.08</a:t>
                       </a:r>
                     </a:p>
                   </a:txBody>
@@ -3810,7 +3811,7 @@
                     <a:p>
                       <a:pPr algn="l"/>
                       <a:r>
-                        <a:rPr sz="1100" b="0">
+                        <a:rPr sz="1100">
                           <a:solidFill>
                             <a:srgbClr val="1B3A4B"/>
                           </a:solidFill>
@@ -3833,7 +3834,7 @@
                     <a:p>
                       <a:pPr algn="r"/>
                       <a:r>
-                        <a:rPr sz="1100" b="0">
+                        <a:rPr sz="1100">
                           <a:solidFill>
                             <a:srgbClr val="1B3A4B"/>
                           </a:solidFill>
@@ -3856,13 +3857,59 @@
                     <a:p>
                       <a:pPr algn="r"/>
                       <a:r>
-                        <a:rPr sz="1100" b="0">
+                        <a:rPr sz="1100">
+                          <a:solidFill>
+                            <a:srgbClr val="1B3A4B"/>
+                          </a:solidFill>
+                          <a:latin typeface="メイリオ"/>
+                        </a:rPr>
+                        <a:t>1,462</a:t>
+                      </a:r>
+                    </a:p>
+                  </a:txBody>
+                  <a:tcPr marL="45720" marR="45720" marT="18288" marB="18288" anchor="ctr">
+                    <a:solidFill>
+                      <a:srgbClr val="FFFFFF"/>
+                    </a:solidFill>
+                  </a:tcPr>
+                </a:tc>
+                <a:tc>
+                  <a:txBody>
+                    <a:bodyPr wrap="square"/>
+                    <a:lstStyle/>
+                    <a:p>
+                      <a:pPr algn="r"/>
+                      <a:r>
+                        <a:rPr sz="1100">
+                          <a:solidFill>
+                            <a:srgbClr val="1B3A4B"/>
+                          </a:solidFill>
+                          <a:latin typeface="メイリオ"/>
+                        </a:rPr>
+                        <a:t>183</a:t>
+                      </a:r>
+                    </a:p>
+                  </a:txBody>
+                  <a:tcPr marL="45720" marR="45720" marT="18288" marB="18288" anchor="ctr">
+                    <a:solidFill>
+                      <a:srgbClr val="FFFFFF"/>
+                    </a:solidFill>
+                  </a:tcPr>
+                </a:tc>
+                <a:tc>
+                  <a:txBody>
+                    <a:bodyPr wrap="square"/>
+                    <a:lstStyle/>
+                    <a:p>
+                      <a:pPr algn="r"/>
+                      <a:r>
+                        <a:rPr sz="1100">
                           <a:solidFill>
                             <a:srgbClr val="5C6770"/>
                           </a:solidFill>
                           <a:latin typeface="メイリオ"/>
                         </a:rPr>
-                        <a:t>1,462</a:t>
+                        <a:t>3.0</a:t>
                       </a:r>
                     </a:p>
                   </a:txBody>
@@ -3879,13 +3926,13 @@
                     <a:p>
                       <a:pPr algn="r"/>
                       <a:r>
-                        <a:rPr sz="1100" b="0">
-                          <a:solidFill>
-                            <a:srgbClr val="1B3A4B"/>
-                          </a:solidFill>
-                          <a:latin typeface="メイリオ"/>
-                        </a:rPr>
-                        <a:t>2,923</a:t>
+                        <a:rPr sz="1200">
+                          <a:solidFill>
+                            <a:srgbClr val="2B4060"/>
+                          </a:solidFill>
+                          <a:latin typeface="メイリオ"/>
+                        </a:rPr>
+                        <a:t>31</a:t>
                       </a:r>
                     </a:p>
                   </a:txBody>
@@ -3902,59 +3949,13 @@
                     <a:p>
                       <a:pPr algn="r"/>
                       <a:r>
-                        <a:rPr sz="1100" b="0">
-                          <a:solidFill>
-                            <a:srgbClr val="1B3A4B"/>
-                          </a:solidFill>
-                          <a:latin typeface="メイリオ"/>
-                        </a:rPr>
-                        <a:t>914</a:t>
-                      </a:r>
-                    </a:p>
-                  </a:txBody>
-                  <a:tcPr marL="45720" marR="45720" marT="18288" marB="18288" anchor="ctr">
-                    <a:solidFill>
-                      <a:srgbClr val="FFFFFF"/>
-                    </a:solidFill>
-                  </a:tcPr>
-                </a:tc>
-                <a:tc>
-                  <a:txBody>
-                    <a:bodyPr wrap="square"/>
-                    <a:lstStyle/>
-                    <a:p>
-                      <a:pPr algn="r"/>
-                      <a:r>
-                        <a:rPr sz="1200" b="0">
-                          <a:solidFill>
-                            <a:srgbClr val="2B4060"/>
-                          </a:solidFill>
-                          <a:latin typeface="メイリオ"/>
-                        </a:rPr>
-                        <a:t>229</a:t>
-                      </a:r>
-                    </a:p>
-                  </a:txBody>
-                  <a:tcPr marL="45720" marR="45720" marT="18288" marB="18288" anchor="ctr">
-                    <a:solidFill>
-                      <a:srgbClr val="FFFFFF"/>
-                    </a:solidFill>
-                  </a:tcPr>
-                </a:tc>
-                <a:tc>
-                  <a:txBody>
-                    <a:bodyPr wrap="square"/>
-                    <a:lstStyle/>
-                    <a:p>
-                      <a:pPr algn="r"/>
-                      <a:r>
-                        <a:rPr sz="1300" b="0">
+                        <a:rPr sz="1200">
                           <a:solidFill>
                             <a:srgbClr val="1D7A70"/>
                           </a:solidFill>
                           <a:latin typeface="メイリオ"/>
                         </a:rPr>
-                        <a:t>3</a:t>
+                        <a:t>0.10</a:t>
                       </a:r>
                     </a:p>
                   </a:txBody>
@@ -3973,7 +3974,7 @@
                     <a:p>
                       <a:pPr algn="l"/>
                       <a:r>
-                        <a:rPr sz="1100" b="0">
+                        <a:rPr sz="1100">
                           <a:solidFill>
                             <a:srgbClr val="1B3A4B"/>
                           </a:solidFill>
@@ -3996,7 +3997,7 @@
                     <a:p>
                       <a:pPr algn="r"/>
                       <a:r>
-                        <a:rPr sz="1100" b="0">
+                        <a:rPr sz="1100">
                           <a:solidFill>
                             <a:srgbClr val="1B3A4B"/>
                           </a:solidFill>
@@ -4019,13 +4020,59 @@
                     <a:p>
                       <a:pPr algn="r"/>
                       <a:r>
-                        <a:rPr sz="1100" b="0">
+                        <a:rPr sz="1100">
+                          <a:solidFill>
+                            <a:srgbClr val="1B3A4B"/>
+                          </a:solidFill>
+                          <a:latin typeface="メイリオ"/>
+                        </a:rPr>
+                        <a:t>1,949</a:t>
+                      </a:r>
+                    </a:p>
+                  </a:txBody>
+                  <a:tcPr marL="45720" marR="45720" marT="18288" marB="18288" anchor="ctr">
+                    <a:solidFill>
+                      <a:srgbClr val="FFF4D6"/>
+                    </a:solidFill>
+                  </a:tcPr>
+                </a:tc>
+                <a:tc>
+                  <a:txBody>
+                    <a:bodyPr wrap="square"/>
+                    <a:lstStyle/>
+                    <a:p>
+                      <a:pPr algn="r"/>
+                      <a:r>
+                        <a:rPr sz="1100">
+                          <a:solidFill>
+                            <a:srgbClr val="1B3A4B"/>
+                          </a:solidFill>
+                          <a:latin typeface="メイリオ"/>
+                        </a:rPr>
+                        <a:t>244</a:t>
+                      </a:r>
+                    </a:p>
+                  </a:txBody>
+                  <a:tcPr marL="45720" marR="45720" marT="18288" marB="18288" anchor="ctr">
+                    <a:solidFill>
+                      <a:srgbClr val="FFF4D6"/>
+                    </a:solidFill>
+                  </a:tcPr>
+                </a:tc>
+                <a:tc>
+                  <a:txBody>
+                    <a:bodyPr wrap="square"/>
+                    <a:lstStyle/>
+                    <a:p>
+                      <a:pPr algn="r"/>
+                      <a:r>
+                        <a:rPr sz="1100">
                           <a:solidFill>
                             <a:srgbClr val="5C6770"/>
                           </a:solidFill>
                           <a:latin typeface="メイリオ"/>
                         </a:rPr>
-                        <a:t>1,949</a:t>
+                        <a:t>4.1</a:t>
                       </a:r>
                     </a:p>
                   </a:txBody>
@@ -4042,13 +4089,13 @@
                     <a:p>
                       <a:pPr algn="r"/>
                       <a:r>
-                        <a:rPr sz="1100" b="0">
-                          <a:solidFill>
-                            <a:srgbClr val="1B3A4B"/>
-                          </a:solidFill>
-                          <a:latin typeface="メイリオ"/>
-                        </a:rPr>
-                        <a:t>3,898</a:t>
+                        <a:rPr sz="1200">
+                          <a:solidFill>
+                            <a:srgbClr val="2B4060"/>
+                          </a:solidFill>
+                          <a:latin typeface="メイリオ"/>
+                        </a:rPr>
+                        <a:t>41</a:t>
                       </a:r>
                     </a:p>
                   </a:txBody>
@@ -4065,59 +4112,13 @@
                     <a:p>
                       <a:pPr algn="r"/>
                       <a:r>
-                        <a:rPr sz="1100" b="0">
-                          <a:solidFill>
-                            <a:srgbClr val="1B3A4B"/>
-                          </a:solidFill>
-                          <a:latin typeface="メイリオ"/>
-                        </a:rPr>
-                        <a:t>1,218</a:t>
-                      </a:r>
-                    </a:p>
-                  </a:txBody>
-                  <a:tcPr marL="45720" marR="45720" marT="18288" marB="18288" anchor="ctr">
-                    <a:solidFill>
-                      <a:srgbClr val="FFF4D6"/>
-                    </a:solidFill>
-                  </a:tcPr>
-                </a:tc>
-                <a:tc>
-                  <a:txBody>
-                    <a:bodyPr wrap="square"/>
-                    <a:lstStyle/>
-                    <a:p>
-                      <a:pPr algn="r"/>
-                      <a:r>
-                        <a:rPr sz="1200" b="0">
-                          <a:solidFill>
-                            <a:srgbClr val="2B4060"/>
-                          </a:solidFill>
-                          <a:latin typeface="メイリオ"/>
-                        </a:rPr>
-                        <a:t>305</a:t>
-                      </a:r>
-                    </a:p>
-                  </a:txBody>
-                  <a:tcPr marL="45720" marR="45720" marT="18288" marB="18288" anchor="ctr">
-                    <a:solidFill>
-                      <a:srgbClr val="FFF4D6"/>
-                    </a:solidFill>
-                  </a:tcPr>
-                </a:tc>
-                <a:tc>
-                  <a:txBody>
-                    <a:bodyPr wrap="square"/>
-                    <a:lstStyle/>
-                    <a:p>
-                      <a:pPr algn="r"/>
-                      <a:r>
-                        <a:rPr sz="1300" b="0">
+                        <a:rPr sz="1200">
                           <a:solidFill>
                             <a:srgbClr val="1D7A70"/>
                           </a:solidFill>
                           <a:latin typeface="メイリオ"/>
                         </a:rPr>
-                        <a:t>4</a:t>
+                        <a:t>0.14</a:t>
                       </a:r>
                     </a:p>
                   </a:txBody>
@@ -4140,7 +4141,7 @@
         </p:nvSpPr>
         <p:spPr>
           <a:xfrm>
-            <a:off x="457200" y="2788920"/>
+            <a:off x="457200" y="2807208"/>
             <a:ext cx="11384280" cy="320040"/>
           </a:xfrm>
           <a:prstGeom prst="rect">
@@ -4184,7 +4185,7 @@
         </p:nvSpPr>
         <p:spPr>
           <a:xfrm>
-            <a:off x="457200" y="3182112"/>
+            <a:off x="457200" y="3200400"/>
             <a:ext cx="11384280" cy="822960"/>
           </a:xfrm>
           <a:prstGeom prst="rect">
@@ -4200,37 +4201,37 @@
           <a:p>
             <a:pPr algn="l"/>
             <a:r>
-              <a:rPr sz="950" b="0">
+              <a:rPr sz="950">
                 <a:solidFill>
                   <a:srgbClr val="5C6770"/>
                 </a:solidFill>
                 <a:latin typeface="メイリオ"/>
               </a:rPr>
-              <a:t>※　営業日30日/月、営業8時間/日。ピーク日＝日平均×日集中率2.0（締切日への集中）、ピーク時＝ピーク日÷8時間×時間集中率2.5（ピーク時間帯）。集中率は仮定値。</a:t>
+              <a:t>※　営業日30日/月、営業8時間/日で慣らした値。ピーク日・ピーク時間帯の偏り（集中率）は実績が無いため考慮していません。</a:t>
             </a:r>
           </a:p>
           <a:p>
             <a:pPr algn="l"/>
             <a:r>
-              <a:rPr sz="950" b="0">
+              <a:rPr sz="950">
                 <a:solidFill>
                   <a:srgbClr val="5C6770"/>
                 </a:solidFill>
                 <a:latin typeface="メイリオ"/>
               </a:rPr>
-              <a:t>※　同時アクセス＝ピーク時到着率（件/分）×滞在10分×安全率1.5。画面を開いている人数で、Web接続数・メモリの根拠。</a:t>
+              <a:t>※　同時アクセス＝分平均（件/分）×滞在10分。画面を開いている人数で、Web接続数・メモリの根拠。</a:t>
             </a:r>
           </a:p>
           <a:p>
             <a:pPr algn="l"/>
             <a:r>
-              <a:rPr sz="950" b="0">
+              <a:rPr sz="950">
                 <a:solidFill>
                   <a:srgbClr val="5C6770"/>
                 </a:solidFill>
                 <a:latin typeface="メイリオ"/>
               </a:rPr>
-              <a:t>※　同時セッション＝ピーク時到着率（件/秒）×当該処理2秒×秒バースト3.0×安全率1.5（下限3）。同一処理を同時に実行する件数で、在庫引当・注文確定の排他の根拠。</a:t>
+              <a:t>※　同時セッション＝秒平均（件/秒）×当該処理2秒。同一処理を同時に実行する件数で、在庫引当・注文確定の排他制御の根拠。</a:t>
             </a:r>
           </a:p>
         </p:txBody>
@@ -4243,8 +4244,8 @@
         </p:nvSpPr>
         <p:spPr>
           <a:xfrm>
-            <a:off x="457200" y="4041648"/>
-            <a:ext cx="11384280" cy="502920"/>
+            <a:off x="457200" y="4069080"/>
+            <a:ext cx="11384280" cy="548640"/>
           </a:xfrm>
           <a:prstGeom prst="rect">
             <a:avLst/>
@@ -4259,7 +4260,7 @@
           <a:p>
             <a:pPr algn="l"/>
             <a:r>
-              <a:rPr sz="1300" b="0">
+              <a:rPr sz="1300">
                 <a:solidFill>
                   <a:srgbClr val="1B3A4B"/>
                 </a:solidFill>
@@ -4271,13 +4272,13 @@
           <a:p>
             <a:pPr algn="l"/>
             <a:r>
-              <a:rPr sz="1300" b="0">
+              <a:rPr sz="1300">
                 <a:solidFill>
                   <a:srgbClr val="1B3A4B"/>
                 </a:solidFill>
                 <a:latin typeface="メイリオ"/>
               </a:rPr>
-              <a:t>　　スペックアップしていくことをご提案します。2倍成長（年58,464件）まで同時セッションは4で収まります。</a:t>
+              <a:t>　　スペックアップしていくことをご提案します。慣らし値は1未満であり、4は時間帯の偏りを吸収するための余裕値です。</a:t>
             </a:r>
           </a:p>
         </p:txBody>
@@ -4290,7 +4291,7 @@
         </p:nvSpPr>
         <p:spPr>
           <a:xfrm>
-            <a:off x="457200" y="4864608"/>
+            <a:off x="457200" y="4892040"/>
             <a:ext cx="11384280" cy="274320"/>
           </a:xfrm>
           <a:prstGeom prst="rect">
@@ -4306,7 +4307,7 @@
           <a:p>
             <a:pPr algn="l"/>
             <a:r>
-              <a:rPr sz="1300" b="0">
+              <a:rPr sz="1300">
                 <a:solidFill>
                   <a:srgbClr val="1B3A4B"/>
                 </a:solidFill>
@@ -4326,8 +4327,8 @@
           <p:nvPr/>
         </p:nvGraphicFramePr>
         <p:xfrm>
-          <a:off x="457200" y="5230368"/>
-          <a:ext cx="9317736" cy="950976"/>
+          <a:off x="457200" y="5248656"/>
+          <a:ext cx="9381744" cy="950976"/>
         </p:xfrm>
         <a:graphic>
           <a:graphicData uri="http://schemas.openxmlformats.org/drawingml/2006/table">
@@ -4336,7 +4337,7 @@
                 <a:tableStyleId>{5C22544A-7EE6-4342-B048-85BDC9FD1C3A}</a:tableStyleId>
               </a:tblPr>
               <a:tblGrid>
-                <a:gridCol w="1417320"/>
+                <a:gridCol w="1481328"/>
                 <a:gridCol w="1298448"/>
                 <a:gridCol w="1298448"/>
                 <a:gridCol w="1325880"/>
@@ -4352,7 +4353,7 @@
                     <a:p>
                       <a:pPr algn="ctr"/>
                       <a:r>
-                        <a:rPr sz="1100" b="0">
+                        <a:rPr sz="1100">
                           <a:solidFill>
                             <a:srgbClr val="FFFFFF"/>
                           </a:solidFill>
@@ -4375,13 +4376,13 @@
                     <a:p>
                       <a:pPr algn="ctr"/>
                       <a:r>
-                        <a:rPr sz="1050" b="0">
+                        <a:rPr sz="1050">
                           <a:solidFill>
                             <a:srgbClr val="FFFFFF"/>
                           </a:solidFill>
                           <a:latin typeface="メイリオ"/>
                         </a:rPr>
-                        <a:t>必要性能（ピーク時・2倍成長）</a:t>
+                        <a:t>必要性能（採用値）</a:t>
                       </a:r>
                     </a:p>
                   </a:txBody>
@@ -4406,7 +4407,7 @@
                     <a:p>
                       <a:pPr algn="ctr"/>
                       <a:r>
-                        <a:rPr sz="1100" b="0">
+                        <a:rPr sz="1100">
                           <a:solidFill>
                             <a:srgbClr val="FFFFFF"/>
                           </a:solidFill>
@@ -4437,7 +4438,7 @@
                     <a:p>
                       <a:pPr algn="ctr"/>
                       <a:r>
-                        <a:rPr sz="1100" b="0">
+                        <a:rPr sz="1100">
                           <a:solidFill>
                             <a:srgbClr val="FFFFFF"/>
                           </a:solidFill>
@@ -4478,7 +4479,7 @@
                     <a:p>
                       <a:pPr algn="ctr"/>
                       <a:r>
-                        <a:rPr sz="1000" b="0">
+                        <a:rPr sz="1000">
                           <a:solidFill>
                             <a:srgbClr val="FFFFFF"/>
                           </a:solidFill>
@@ -4501,7 +4502,7 @@
                     <a:p>
                       <a:pPr algn="ctr"/>
                       <a:r>
-                        <a:rPr sz="1000" b="0">
+                        <a:rPr sz="1000">
                           <a:solidFill>
                             <a:srgbClr val="FFFFFF"/>
                           </a:solidFill>
@@ -4524,7 +4525,7 @@
                     <a:p>
                       <a:pPr algn="ctr"/>
                       <a:r>
-                        <a:rPr sz="1000" b="0">
+                        <a:rPr sz="1000">
                           <a:solidFill>
                             <a:srgbClr val="FFFFFF"/>
                           </a:solidFill>
@@ -4547,7 +4548,7 @@
                     <a:p>
                       <a:pPr algn="ctr"/>
                       <a:r>
-                        <a:rPr sz="1000" b="0">
+                        <a:rPr sz="1000">
                           <a:solidFill>
                             <a:srgbClr val="FFFFFF"/>
                           </a:solidFill>
@@ -4570,7 +4571,7 @@
                     <a:p>
                       <a:pPr algn="ctr"/>
                       <a:r>
-                        <a:rPr sz="1000" b="0">
+                        <a:rPr sz="1000">
                           <a:solidFill>
                             <a:srgbClr val="FFFFFF"/>
                           </a:solidFill>
@@ -4593,7 +4594,7 @@
                     <a:p>
                       <a:pPr algn="ctr"/>
                       <a:r>
-                        <a:rPr sz="1000" b="0">
+                        <a:rPr sz="1000">
                           <a:solidFill>
                             <a:srgbClr val="FFFFFF"/>
                           </a:solidFill>
@@ -4618,7 +4619,7 @@
                     <a:p>
                       <a:pPr algn="l"/>
                       <a:r>
-                        <a:rPr sz="1100" b="0">
+                        <a:rPr sz="1100">
                           <a:solidFill>
                             <a:srgbClr val="1B3A4B"/>
                           </a:solidFill>
@@ -4641,7 +4642,7 @@
                     <a:p>
                       <a:pPr algn="ctr"/>
                       <a:r>
-                        <a:rPr sz="1100" b="0">
+                        <a:rPr sz="1100">
                           <a:solidFill>
                             <a:srgbClr val="1B3A4B"/>
                           </a:solidFill>
@@ -4664,13 +4665,13 @@
                     <a:p>
                       <a:pPr algn="ctr"/>
                       <a:r>
-                        <a:rPr sz="1100" b="0">
+                        <a:rPr sz="1100">
                           <a:solidFill>
                             <a:srgbClr val="1B3A4B"/>
                           </a:solidFill>
                           <a:latin typeface="メイリオ"/>
                         </a:rPr>
-                        <a:t>305</a:t>
+                        <a:t>220</a:t>
                       </a:r>
                     </a:p>
                   </a:txBody>
@@ -4687,7 +4688,7 @@
                     <a:p>
                       <a:pPr algn="ctr"/>
                       <a:r>
-                        <a:rPr sz="1100" b="0">
+                        <a:rPr sz="1100">
                           <a:solidFill>
                             <a:srgbClr val="1B3A4B"/>
                           </a:solidFill>
@@ -4710,7 +4711,7 @@
                     <a:p>
                       <a:pPr algn="ctr"/>
                       <a:r>
-                        <a:rPr sz="1100" b="0">
+                        <a:rPr sz="1100">
                           <a:solidFill>
                             <a:srgbClr val="1B3A4B"/>
                           </a:solidFill>
@@ -4733,7 +4734,7 @@
                     <a:p>
                       <a:pPr algn="ctr"/>
                       <a:r>
-                        <a:rPr sz="1100" b="0">
+                        <a:rPr sz="1100">
                           <a:solidFill>
                             <a:srgbClr val="1B3A4B"/>
                           </a:solidFill>
@@ -4756,7 +4757,7 @@
                     <a:p>
                       <a:pPr algn="ctr"/>
                       <a:r>
-                        <a:rPr sz="1100" b="0">
+                        <a:rPr sz="1100">
                           <a:solidFill>
                             <a:srgbClr val="1B3A4B"/>
                           </a:solidFill>
@@ -4785,7 +4786,7 @@
         </p:nvSpPr>
         <p:spPr>
           <a:xfrm>
-            <a:off x="4471416" y="5230368"/>
+            <a:off x="4535424" y="5248656"/>
             <a:ext cx="2651760" cy="950976"/>
           </a:xfrm>
           <a:prstGeom prst="rect">
@@ -4829,8 +4830,8 @@
         </p:nvSpPr>
         <p:spPr>
           <a:xfrm>
-            <a:off x="457200" y="6455664"/>
-            <a:ext cx="11384280" cy="274320"/>
+            <a:off x="457200" y="6309360"/>
+            <a:ext cx="11384280" cy="457200"/>
           </a:xfrm>
           <a:prstGeom prst="rect">
             <a:avLst/>
@@ -4845,13 +4846,1284 @@
           <a:p>
             <a:pPr algn="l"/>
             <a:r>
-              <a:rPr sz="950" b="0">
+              <a:rPr sz="950">
                 <a:solidFill>
                   <a:srgbClr val="C0392B"/>
                 </a:solidFill>
                 <a:latin typeface="メイリオ"/>
               </a:rPr>
-              <a:t>※　プラン1で同時セッション4を充足。同時アクセス305は接続保持・メモリ側の要件であり、プラン1で保持可能なことを負荷試験で確認します。</a:t>
+              <a:t>※　採用値は慣らし値ではなく、次ページの境目（同時セッション4を超える水準）から設定しています。</a:t>
+            </a:r>
+          </a:p>
+        </p:txBody>
+      </p:sp>
+    </p:spTree>
+  </p:cSld>
+  <p:clrMapOvr>
+    <a:masterClrMapping/>
+  </p:clrMapOvr>
+</p:sld>
+</file>
+
+<file path=ppt/slides/slide2.xml><?xml version="1.0" encoding="utf-8"?>
+<p:sld xmlns:a="http://schemas.openxmlformats.org/drawingml/2006/main" xmlns:p="http://schemas.openxmlformats.org/presentationml/2006/main" xmlns:r="http://schemas.openxmlformats.org/officeDocument/2006/relationships">
+  <p:cSld>
+    <p:spTree>
+      <p:nvGrpSpPr>
+        <p:cNvPr id="1" name=""/>
+        <p:cNvGrpSpPr/>
+        <p:nvPr/>
+      </p:nvGrpSpPr>
+      <p:grpSpPr/>
+      <p:sp>
+        <p:nvSpPr>
+          <p:cNvPr id="2" name="TextBox 1"/>
+          <p:cNvSpPr txBox="1"/>
+          <p:nvPr/>
+        </p:nvSpPr>
+        <p:spPr>
+          <a:xfrm>
+            <a:off x="411480" y="201168"/>
+            <a:ext cx="11338560" cy="457200"/>
+          </a:xfrm>
+          <a:prstGeom prst="rect">
+            <a:avLst/>
+          </a:prstGeom>
+          <a:noFill/>
+        </p:spPr>
+        <p:txBody>
+          <a:bodyPr wrap="square" lIns="0" tIns="0" rIns="0" bIns="0">
+            <a:spAutoFit/>
+          </a:bodyPr>
+          <a:lstStyle/>
+          <a:p>
+            <a:pPr algn="l"/>
+            <a:r>
+              <a:rPr sz="2600">
+                <a:solidFill>
+                  <a:srgbClr val="1B3A4B"/>
+                </a:solidFill>
+                <a:latin typeface="メイリオ"/>
+              </a:rPr>
+              <a:t>4.対応内容説明 - システム構成（2/3 補足：見直しの境目）</a:t>
+            </a:r>
+          </a:p>
+        </p:txBody>
+      </p:sp>
+      <p:sp>
+        <p:nvSpPr>
+          <p:cNvPr id="3" name="Rectangle 2"/>
+          <p:cNvSpPr/>
+          <p:nvPr/>
+        </p:nvSpPr>
+        <p:spPr>
+          <a:xfrm>
+            <a:off x="411480" y="749808"/>
+            <a:ext cx="11384280" cy="27432"/>
+          </a:xfrm>
+          <a:prstGeom prst="rect">
+            <a:avLst/>
+          </a:prstGeom>
+          <a:solidFill>
+            <a:srgbClr val="3D5A80"/>
+          </a:solidFill>
+          <a:ln>
+            <a:noFill/>
+          </a:ln>
+          <a:effectLst/>
+        </p:spPr>
+        <p:style>
+          <a:lnRef idx="1">
+            <a:schemeClr val="accent1"/>
+          </a:lnRef>
+          <a:fillRef idx="3">
+            <a:schemeClr val="accent1"/>
+          </a:fillRef>
+          <a:effectRef idx="2">
+            <a:schemeClr val="accent1"/>
+          </a:effectRef>
+          <a:fontRef idx="minor">
+            <a:schemeClr val="lt1"/>
+          </a:fontRef>
+        </p:style>
+        <p:txBody>
+          <a:bodyPr rtlCol="0" anchor="ctr"/>
+          <a:lstStyle/>
+          <a:p>
+            <a:pPr algn="ctr"/>
+          </a:p>
+        </p:txBody>
+      </p:sp>
+      <p:sp>
+        <p:nvSpPr>
+          <p:cNvPr id="4" name="TextBox 3"/>
+          <p:cNvSpPr txBox="1"/>
+          <p:nvPr/>
+        </p:nvSpPr>
+        <p:spPr>
+          <a:xfrm>
+            <a:off x="457200" y="896112"/>
+            <a:ext cx="11338560" cy="274320"/>
+          </a:xfrm>
+          <a:prstGeom prst="rect">
+            <a:avLst/>
+          </a:prstGeom>
+          <a:noFill/>
+        </p:spPr>
+        <p:txBody>
+          <a:bodyPr wrap="square" lIns="0" tIns="0" rIns="0" bIns="0">
+            <a:spAutoFit/>
+          </a:bodyPr>
+          <a:lstStyle/>
+          <a:p>
+            <a:pPr algn="l"/>
+            <a:r>
+              <a:rPr sz="1300">
+                <a:solidFill>
+                  <a:srgbClr val="1B3A4B"/>
+                </a:solidFill>
+                <a:latin typeface="メイリオ"/>
+              </a:rPr>
+              <a:t>⑤　ピーク日・ピーク時間帯の偏りは実績が無いため、同時セッション4がどこまでの偏りを吸収できるかを整理しました。</a:t>
+            </a:r>
+          </a:p>
+        </p:txBody>
+      </p:sp>
+      <p:sp>
+        <p:nvSpPr>
+          <p:cNvPr id="5" name="Rectangle 4"/>
+          <p:cNvSpPr/>
+          <p:nvPr/>
+        </p:nvSpPr>
+        <p:spPr>
+          <a:xfrm>
+            <a:off x="457200" y="1280160"/>
+            <a:ext cx="5669280" cy="2148840"/>
+          </a:xfrm>
+          <a:prstGeom prst="rect">
+            <a:avLst/>
+          </a:prstGeom>
+          <a:solidFill>
+            <a:srgbClr val="E0F1EE"/>
+          </a:solidFill>
+          <a:ln w="19050">
+            <a:solidFill>
+              <a:srgbClr val="1D7A70"/>
+            </a:solidFill>
+          </a:ln>
+          <a:effectLst/>
+        </p:spPr>
+        <p:style>
+          <a:lnRef idx="1">
+            <a:schemeClr val="accent1"/>
+          </a:lnRef>
+          <a:fillRef idx="3">
+            <a:schemeClr val="accent1"/>
+          </a:fillRef>
+          <a:effectRef idx="2">
+            <a:schemeClr val="accent1"/>
+          </a:effectRef>
+          <a:fontRef idx="minor">
+            <a:schemeClr val="lt1"/>
+          </a:fontRef>
+        </p:style>
+        <p:txBody>
+          <a:bodyPr rtlCol="0" anchor="ctr"/>
+          <a:lstStyle/>
+          <a:p>
+            <a:pPr algn="ctr"/>
+          </a:p>
+        </p:txBody>
+      </p:sp>
+      <p:sp>
+        <p:nvSpPr>
+          <p:cNvPr id="6" name="TextBox 5"/>
+          <p:cNvSpPr txBox="1"/>
+          <p:nvPr/>
+        </p:nvSpPr>
+        <p:spPr>
+          <a:xfrm>
+            <a:off x="685800" y="1444752"/>
+            <a:ext cx="5212080" cy="320040"/>
+          </a:xfrm>
+          <a:prstGeom prst="rect">
+            <a:avLst/>
+          </a:prstGeom>
+          <a:noFill/>
+        </p:spPr>
+        <p:txBody>
+          <a:bodyPr wrap="square" lIns="0" tIns="0" rIns="0" bIns="0">
+            <a:spAutoFit/>
+          </a:bodyPr>
+          <a:lstStyle/>
+          <a:p>
+            <a:pPr algn="l"/>
+            <a:r>
+              <a:rPr sz="1500">
+                <a:solidFill>
+                  <a:srgbClr val="1D7A70"/>
+                </a:solidFill>
+                <a:latin typeface="メイリオ"/>
+              </a:rPr>
+              <a:t>同時セッション4の限界</a:t>
+            </a:r>
+          </a:p>
+        </p:txBody>
+      </p:sp>
+      <p:sp>
+        <p:nvSpPr>
+          <p:cNvPr id="7" name="TextBox 6"/>
+          <p:cNvSpPr txBox="1"/>
+          <p:nvPr/>
+        </p:nvSpPr>
+        <p:spPr>
+          <a:xfrm>
+            <a:off x="685800" y="1874519"/>
+            <a:ext cx="5212080" cy="1463040"/>
+          </a:xfrm>
+          <a:prstGeom prst="rect">
+            <a:avLst/>
+          </a:prstGeom>
+          <a:noFill/>
+        </p:spPr>
+        <p:txBody>
+          <a:bodyPr wrap="square" lIns="0" tIns="0" rIns="0" bIns="0">
+            <a:spAutoFit/>
+          </a:bodyPr>
+          <a:lstStyle/>
+          <a:p>
+            <a:pPr algn="l"/>
+            <a:r>
+              <a:rPr sz="1150">
+                <a:solidFill>
+                  <a:srgbClr val="1B3A4B"/>
+                </a:solidFill>
+                <a:latin typeface="メイリオ"/>
+              </a:rPr>
+              <a:t>平均で4に達する到着率</a:t>
+            </a:r>
+          </a:p>
+          <a:p>
+            <a:pPr algn="l"/>
+            <a:r>
+              <a:rPr sz="1150">
+                <a:solidFill>
+                  <a:srgbClr val="1B3A4B"/>
+                </a:solidFill>
+                <a:latin typeface="メイリオ"/>
+              </a:rPr>
+              <a:t>　4件 ÷ 処理2秒 ＝ 2.0件/秒 ＝ 7,200件/時</a:t>
+            </a:r>
+          </a:p>
+          <a:p>
+            <a:pPr algn="l"/>
+            <a:r>
+              <a:rPr sz="1150">
+                <a:solidFill>
+                  <a:srgbClr val="1B3A4B"/>
+                </a:solidFill>
+                <a:latin typeface="メイリオ"/>
+              </a:rPr>
+              <a:t/>
+            </a:r>
+          </a:p>
+          <a:p>
+            <a:pPr algn="l"/>
+            <a:r>
+              <a:rPr sz="1150">
+                <a:solidFill>
+                  <a:srgbClr val="1B3A4B"/>
+                </a:solidFill>
+                <a:latin typeface="メイリオ"/>
+              </a:rPr>
+              <a:t>瞬間的に4を超え始める到着率</a:t>
+            </a:r>
+          </a:p>
+          <a:p>
+            <a:pPr algn="l"/>
+            <a:r>
+              <a:rPr sz="1150">
+                <a:solidFill>
+                  <a:srgbClr val="1B3A4B"/>
+                </a:solidFill>
+                <a:latin typeface="メイリオ"/>
+              </a:rPr>
+              <a:t>　約22件/分 ＝ 約1,331件/時</a:t>
+            </a:r>
+          </a:p>
+          <a:p>
+            <a:pPr algn="l"/>
+            <a:r>
+              <a:rPr sz="1150">
+                <a:solidFill>
+                  <a:srgbClr val="1B3A4B"/>
+                </a:solidFill>
+                <a:latin typeface="メイリオ"/>
+              </a:rPr>
+              <a:t>　（同時アクセス 約222人に相当）</a:t>
+            </a:r>
+          </a:p>
+        </p:txBody>
+      </p:sp>
+      <p:sp>
+        <p:nvSpPr>
+          <p:cNvPr id="8" name="Rectangle 7"/>
+          <p:cNvSpPr/>
+          <p:nvPr/>
+        </p:nvSpPr>
+        <p:spPr>
+          <a:xfrm>
+            <a:off x="6400800" y="1280160"/>
+            <a:ext cx="5440680" cy="2148840"/>
+          </a:xfrm>
+          <a:prstGeom prst="rect">
+            <a:avLst/>
+          </a:prstGeom>
+          <a:solidFill>
+            <a:srgbClr val="FFF8EE"/>
+          </a:solidFill>
+          <a:ln w="19050">
+            <a:solidFill>
+              <a:srgbClr val="E07A3D"/>
+            </a:solidFill>
+          </a:ln>
+          <a:effectLst/>
+        </p:spPr>
+        <p:style>
+          <a:lnRef idx="1">
+            <a:schemeClr val="accent1"/>
+          </a:lnRef>
+          <a:fillRef idx="3">
+            <a:schemeClr val="accent1"/>
+          </a:fillRef>
+          <a:effectRef idx="2">
+            <a:schemeClr val="accent1"/>
+          </a:effectRef>
+          <a:fontRef idx="minor">
+            <a:schemeClr val="lt1"/>
+          </a:fontRef>
+        </p:style>
+        <p:txBody>
+          <a:bodyPr rtlCol="0" anchor="ctr"/>
+          <a:lstStyle/>
+          <a:p>
+            <a:pPr algn="ctr"/>
+          </a:p>
+        </p:txBody>
+      </p:sp>
+      <p:sp>
+        <p:nvSpPr>
+          <p:cNvPr id="9" name="TextBox 8"/>
+          <p:cNvSpPr txBox="1"/>
+          <p:nvPr/>
+        </p:nvSpPr>
+        <p:spPr>
+          <a:xfrm>
+            <a:off x="6629400" y="1444752"/>
+            <a:ext cx="4983480" cy="320040"/>
+          </a:xfrm>
+          <a:prstGeom prst="rect">
+            <a:avLst/>
+          </a:prstGeom>
+          <a:noFill/>
+        </p:spPr>
+        <p:txBody>
+          <a:bodyPr wrap="square" lIns="0" tIns="0" rIns="0" bIns="0">
+            <a:spAutoFit/>
+          </a:bodyPr>
+          <a:lstStyle/>
+          <a:p>
+            <a:pPr algn="l"/>
+            <a:r>
+              <a:rPr sz="1500">
+                <a:solidFill>
+                  <a:srgbClr val="E07A3D"/>
+                </a:solidFill>
+                <a:latin typeface="メイリオ"/>
+              </a:rPr>
+              <a:t>つまり、この水準までは4で足りる</a:t>
+            </a:r>
+          </a:p>
+        </p:txBody>
+      </p:sp>
+      <p:sp>
+        <p:nvSpPr>
+          <p:cNvPr id="10" name="TextBox 9"/>
+          <p:cNvSpPr txBox="1"/>
+          <p:nvPr/>
+        </p:nvSpPr>
+        <p:spPr>
+          <a:xfrm>
+            <a:off x="6629400" y="1874519"/>
+            <a:ext cx="4983480" cy="1463040"/>
+          </a:xfrm>
+          <a:prstGeom prst="rect">
+            <a:avLst/>
+          </a:prstGeom>
+          <a:noFill/>
+        </p:spPr>
+        <p:txBody>
+          <a:bodyPr wrap="square" lIns="0" tIns="0" rIns="0" bIns="0">
+            <a:spAutoFit/>
+          </a:bodyPr>
+          <a:lstStyle/>
+          <a:p>
+            <a:pPr algn="l"/>
+            <a:r>
+              <a:rPr sz="1150">
+                <a:solidFill>
+                  <a:srgbClr val="1B3A4B"/>
+                </a:solidFill>
+                <a:latin typeface="メイリオ"/>
+              </a:rPr>
+              <a:t>ピーク時間帯の注文が</a:t>
+            </a:r>
+          </a:p>
+          <a:p>
+            <a:pPr algn="l"/>
+            <a:r>
+              <a:rPr sz="1150">
+                <a:solidFill>
+                  <a:srgbClr val="1B3A4B"/>
+                </a:solidFill>
+                <a:latin typeface="メイリオ"/>
+              </a:rPr>
+              <a:t>　約1,331件/時（約22件/分）</a:t>
+            </a:r>
+          </a:p>
+          <a:p>
+            <a:pPr algn="l"/>
+            <a:r>
+              <a:rPr sz="1150">
+                <a:solidFill>
+                  <a:srgbClr val="1B3A4B"/>
+                </a:solidFill>
+                <a:latin typeface="メイリオ"/>
+              </a:rPr>
+              <a:t>を超えない限り、同時セッション4で処理できます。</a:t>
+            </a:r>
+          </a:p>
+          <a:p>
+            <a:pPr algn="l"/>
+            <a:r>
+              <a:rPr sz="1150">
+                <a:solidFill>
+                  <a:srgbClr val="1B3A4B"/>
+                </a:solidFill>
+                <a:latin typeface="メイリオ"/>
+              </a:rPr>
+              <a:t/>
+            </a:r>
+          </a:p>
+          <a:p>
+            <a:pPr algn="l"/>
+            <a:r>
+              <a:rPr sz="1150">
+                <a:solidFill>
+                  <a:srgbClr val="1B3A4B"/>
+                </a:solidFill>
+                <a:latin typeface="メイリオ"/>
+              </a:rPr>
+              <a:t>慣らし値（時間平均）に対する許容倍率は下表のとおりです。</a:t>
+            </a:r>
+          </a:p>
+        </p:txBody>
+      </p:sp>
+      <p:graphicFrame>
+        <p:nvGraphicFramePr>
+          <p:cNvPr id="11" name="Table 10"/>
+          <p:cNvGraphicFramePr>
+            <a:graphicFrameLocks noGrp="1"/>
+          </p:cNvGraphicFramePr>
+          <p:nvPr/>
+        </p:nvGraphicFramePr>
+        <p:xfrm>
+          <a:off x="457200" y="3657600"/>
+          <a:ext cx="11384280" cy="1847088"/>
+        </p:xfrm>
+        <a:graphic>
+          <a:graphicData uri="http://schemas.openxmlformats.org/drawingml/2006/table">
+            <a:tbl>
+              <a:tblPr firstRow="1" bandRow="1">
+                <a:tableStyleId>{5C22544A-7EE6-4342-B048-85BDC9FD1C3A}</a:tableStyleId>
+              </a:tblPr>
+              <a:tblGrid>
+                <a:gridCol w="1600200"/>
+                <a:gridCol w="2148840"/>
+                <a:gridCol w="2514600"/>
+                <a:gridCol w="2286000"/>
+                <a:gridCol w="2834640"/>
+              </a:tblGrid>
+              <a:tr h="566928">
+                <a:tc>
+                  <a:txBody>
+                    <a:bodyPr wrap="square"/>
+                    <a:lstStyle/>
+                    <a:p>
+                      <a:pPr algn="ctr"/>
+                      <a:r>
+                        <a:rPr sz="1050">
+                          <a:solidFill>
+                            <a:srgbClr val="FFFFFF"/>
+                          </a:solidFill>
+                          <a:latin typeface="メイリオ"/>
+                        </a:rPr>
+                        <a:t>成長倍率</a:t>
+                      </a:r>
+                    </a:p>
+                  </a:txBody>
+                  <a:tcPr marL="45720" marR="45720" marT="18288" marB="18288" anchor="ctr">
+                    <a:solidFill>
+                      <a:srgbClr val="3D5A80"/>
+                    </a:solidFill>
+                  </a:tcPr>
+                </a:tc>
+                <a:tc>
+                  <a:txBody>
+                    <a:bodyPr wrap="square"/>
+                    <a:lstStyle/>
+                    <a:p>
+                      <a:pPr algn="ctr"/>
+                      <a:r>
+                        <a:rPr sz="1050">
+                          <a:solidFill>
+                            <a:srgbClr val="FFFFFF"/>
+                          </a:solidFill>
+                          <a:latin typeface="メイリオ"/>
+                        </a:rPr>
+                        <a:t>時間平均</a:t>
+                      </a:r>
+                    </a:p>
+                    <a:p>
+                      <a:pPr algn="ctr"/>
+                      <a:r>
+                        <a:rPr sz="800">
+                          <a:solidFill>
+                            <a:srgbClr val="FFFFFF"/>
+                          </a:solidFill>
+                          <a:latin typeface="メイリオ"/>
+                        </a:rPr>
+                        <a:t>（件/時）</a:t>
+                      </a:r>
+                    </a:p>
+                  </a:txBody>
+                  <a:tcPr marL="45720" marR="45720" marT="18288" marB="18288" anchor="ctr">
+                    <a:solidFill>
+                      <a:srgbClr val="3D5A80"/>
+                    </a:solidFill>
+                  </a:tcPr>
+                </a:tc>
+                <a:tc>
+                  <a:txBody>
+                    <a:bodyPr wrap="square"/>
+                    <a:lstStyle/>
+                    <a:p>
+                      <a:pPr algn="ctr"/>
+                      <a:r>
+                        <a:rPr sz="1050">
+                          <a:solidFill>
+                            <a:srgbClr val="FFFFFF"/>
+                          </a:solidFill>
+                          <a:latin typeface="メイリオ"/>
+                        </a:rPr>
+                        <a:t>同時セッション</a:t>
+                      </a:r>
+                    </a:p>
+                    <a:p>
+                      <a:pPr algn="ctr"/>
+                      <a:r>
+                        <a:rPr sz="800">
+                          <a:solidFill>
+                            <a:srgbClr val="FFFFFF"/>
+                          </a:solidFill>
+                          <a:latin typeface="メイリオ"/>
+                        </a:rPr>
+                        <a:t>（慣らし値）</a:t>
+                      </a:r>
+                    </a:p>
+                  </a:txBody>
+                  <a:tcPr marL="45720" marR="45720" marT="18288" marB="18288" anchor="ctr">
+                    <a:solidFill>
+                      <a:srgbClr val="3D5A80"/>
+                    </a:solidFill>
+                  </a:tcPr>
+                </a:tc>
+                <a:tc>
+                  <a:txBody>
+                    <a:bodyPr wrap="square"/>
+                    <a:lstStyle/>
+                    <a:p>
+                      <a:pPr algn="ctr"/>
+                      <a:r>
+                        <a:rPr sz="1050">
+                          <a:solidFill>
+                            <a:srgbClr val="FFFFFF"/>
+                          </a:solidFill>
+                          <a:latin typeface="メイリオ"/>
+                        </a:rPr>
+                        <a:t>境目</a:t>
+                      </a:r>
+                    </a:p>
+                    <a:p>
+                      <a:pPr algn="ctr"/>
+                      <a:r>
+                        <a:rPr sz="800">
+                          <a:solidFill>
+                            <a:srgbClr val="FFFFFF"/>
+                          </a:solidFill>
+                          <a:latin typeface="メイリオ"/>
+                        </a:rPr>
+                        <a:t>（件/時）</a:t>
+                      </a:r>
+                    </a:p>
+                  </a:txBody>
+                  <a:tcPr marL="45720" marR="45720" marT="18288" marB="18288" anchor="ctr">
+                    <a:solidFill>
+                      <a:srgbClr val="3D5A80"/>
+                    </a:solidFill>
+                  </a:tcPr>
+                </a:tc>
+                <a:tc>
+                  <a:txBody>
+                    <a:bodyPr wrap="square"/>
+                    <a:lstStyle/>
+                    <a:p>
+                      <a:pPr algn="ctr"/>
+                      <a:r>
+                        <a:rPr sz="1050">
+                          <a:solidFill>
+                            <a:srgbClr val="FFFFFF"/>
+                          </a:solidFill>
+                          <a:latin typeface="メイリオ"/>
+                        </a:rPr>
+                        <a:t>許容できる</a:t>
+                      </a:r>
+                    </a:p>
+                    <a:p>
+                      <a:pPr algn="ctr"/>
+                      <a:r>
+                        <a:rPr sz="800">
+                          <a:solidFill>
+                            <a:srgbClr val="FFFFFF"/>
+                          </a:solidFill>
+                          <a:latin typeface="メイリオ"/>
+                        </a:rPr>
+                        <a:t>時間帯の偏り</a:t>
+                      </a:r>
+                    </a:p>
+                  </a:txBody>
+                  <a:tcPr marL="45720" marR="45720" marT="18288" marB="18288" anchor="ctr">
+                    <a:solidFill>
+                      <a:srgbClr val="E07A3D"/>
+                    </a:solidFill>
+                  </a:tcPr>
+                </a:tc>
+              </a:tr>
+              <a:tr h="320040">
+                <a:tc>
+                  <a:txBody>
+                    <a:bodyPr wrap="square"/>
+                    <a:lstStyle/>
+                    <a:p>
+                      <a:pPr algn="l"/>
+                      <a:r>
+                        <a:rPr sz="1100">
+                          <a:solidFill>
+                            <a:srgbClr val="1B3A4B"/>
+                          </a:solidFill>
+                          <a:latin typeface="メイリオ"/>
+                        </a:rPr>
+                        <a:t>現状</a:t>
+                      </a:r>
+                    </a:p>
+                  </a:txBody>
+                  <a:tcPr marL="45720" marR="45720" marT="18288" marB="18288" anchor="ctr">
+                    <a:solidFill>
+                      <a:srgbClr val="FFFFFF"/>
+                    </a:solidFill>
+                  </a:tcPr>
+                </a:tc>
+                <a:tc>
+                  <a:txBody>
+                    <a:bodyPr wrap="square"/>
+                    <a:lstStyle/>
+                    <a:p>
+                      <a:pPr algn="r"/>
+                      <a:r>
+                        <a:rPr sz="1100">
+                          <a:solidFill>
+                            <a:srgbClr val="1B3A4B"/>
+                          </a:solidFill>
+                          <a:latin typeface="メイリオ"/>
+                        </a:rPr>
+                        <a:t>122</a:t>
+                      </a:r>
+                    </a:p>
+                  </a:txBody>
+                  <a:tcPr marL="45720" marR="45720" marT="18288" marB="18288" anchor="ctr">
+                    <a:solidFill>
+                      <a:srgbClr val="FFFFFF"/>
+                    </a:solidFill>
+                  </a:tcPr>
+                </a:tc>
+                <a:tc>
+                  <a:txBody>
+                    <a:bodyPr wrap="square"/>
+                    <a:lstStyle/>
+                    <a:p>
+                      <a:pPr algn="r"/>
+                      <a:r>
+                        <a:rPr sz="1100">
+                          <a:solidFill>
+                            <a:srgbClr val="1D7A70"/>
+                          </a:solidFill>
+                          <a:latin typeface="メイリオ"/>
+                        </a:rPr>
+                        <a:t>0.07</a:t>
+                      </a:r>
+                    </a:p>
+                  </a:txBody>
+                  <a:tcPr marL="45720" marR="45720" marT="18288" marB="18288" anchor="ctr">
+                    <a:solidFill>
+                      <a:srgbClr val="FFFFFF"/>
+                    </a:solidFill>
+                  </a:tcPr>
+                </a:tc>
+                <a:tc>
+                  <a:txBody>
+                    <a:bodyPr wrap="square"/>
+                    <a:lstStyle/>
+                    <a:p>
+                      <a:pPr algn="r"/>
+                      <a:r>
+                        <a:rPr sz="1100">
+                          <a:solidFill>
+                            <a:srgbClr val="1B3A4B"/>
+                          </a:solidFill>
+                          <a:latin typeface="メイリオ"/>
+                        </a:rPr>
+                        <a:t>1,331</a:t>
+                      </a:r>
+                    </a:p>
+                  </a:txBody>
+                  <a:tcPr marL="45720" marR="45720" marT="18288" marB="18288" anchor="ctr">
+                    <a:solidFill>
+                      <a:srgbClr val="FFFFFF"/>
+                    </a:solidFill>
+                  </a:tcPr>
+                </a:tc>
+                <a:tc>
+                  <a:txBody>
+                    <a:bodyPr wrap="square"/>
+                    <a:lstStyle/>
+                    <a:p>
+                      <a:pPr algn="r"/>
+                      <a:r>
+                        <a:rPr sz="1200">
+                          <a:solidFill>
+                            <a:srgbClr val="E07A3D"/>
+                          </a:solidFill>
+                          <a:latin typeface="メイリオ"/>
+                        </a:rPr>
+                        <a:t>平均の約11倍まで</a:t>
+                      </a:r>
+                    </a:p>
+                  </a:txBody>
+                  <a:tcPr marL="45720" marR="45720" marT="18288" marB="18288" anchor="ctr">
+                    <a:solidFill>
+                      <a:srgbClr val="FFFFFF"/>
+                    </a:solidFill>
+                  </a:tcPr>
+                </a:tc>
+              </a:tr>
+              <a:tr h="320040">
+                <a:tc>
+                  <a:txBody>
+                    <a:bodyPr wrap="square"/>
+                    <a:lstStyle/>
+                    <a:p>
+                      <a:pPr algn="l"/>
+                      <a:r>
+                        <a:rPr sz="1100">
+                          <a:solidFill>
+                            <a:srgbClr val="1B3A4B"/>
+                          </a:solidFill>
+                          <a:latin typeface="メイリオ"/>
+                        </a:rPr>
+                        <a:t>1.2倍</a:t>
+                      </a:r>
+                    </a:p>
+                  </a:txBody>
+                  <a:tcPr marL="45720" marR="45720" marT="18288" marB="18288" anchor="ctr">
+                    <a:solidFill>
+                      <a:srgbClr val="F4F7FB"/>
+                    </a:solidFill>
+                  </a:tcPr>
+                </a:tc>
+                <a:tc>
+                  <a:txBody>
+                    <a:bodyPr wrap="square"/>
+                    <a:lstStyle/>
+                    <a:p>
+                      <a:pPr algn="r"/>
+                      <a:r>
+                        <a:rPr sz="1100">
+                          <a:solidFill>
+                            <a:srgbClr val="1B3A4B"/>
+                          </a:solidFill>
+                          <a:latin typeface="メイリオ"/>
+                        </a:rPr>
+                        <a:t>146</a:t>
+                      </a:r>
+                    </a:p>
+                  </a:txBody>
+                  <a:tcPr marL="45720" marR="45720" marT="18288" marB="18288" anchor="ctr">
+                    <a:solidFill>
+                      <a:srgbClr val="F4F7FB"/>
+                    </a:solidFill>
+                  </a:tcPr>
+                </a:tc>
+                <a:tc>
+                  <a:txBody>
+                    <a:bodyPr wrap="square"/>
+                    <a:lstStyle/>
+                    <a:p>
+                      <a:pPr algn="r"/>
+                      <a:r>
+                        <a:rPr sz="1100">
+                          <a:solidFill>
+                            <a:srgbClr val="1D7A70"/>
+                          </a:solidFill>
+                          <a:latin typeface="メイリオ"/>
+                        </a:rPr>
+                        <a:t>0.08</a:t>
+                      </a:r>
+                    </a:p>
+                  </a:txBody>
+                  <a:tcPr marL="45720" marR="45720" marT="18288" marB="18288" anchor="ctr">
+                    <a:solidFill>
+                      <a:srgbClr val="F4F7FB"/>
+                    </a:solidFill>
+                  </a:tcPr>
+                </a:tc>
+                <a:tc>
+                  <a:txBody>
+                    <a:bodyPr wrap="square"/>
+                    <a:lstStyle/>
+                    <a:p>
+                      <a:pPr algn="r"/>
+                      <a:r>
+                        <a:rPr sz="1100">
+                          <a:solidFill>
+                            <a:srgbClr val="1B3A4B"/>
+                          </a:solidFill>
+                          <a:latin typeface="メイリオ"/>
+                        </a:rPr>
+                        <a:t>1,331</a:t>
+                      </a:r>
+                    </a:p>
+                  </a:txBody>
+                  <a:tcPr marL="45720" marR="45720" marT="18288" marB="18288" anchor="ctr">
+                    <a:solidFill>
+                      <a:srgbClr val="F4F7FB"/>
+                    </a:solidFill>
+                  </a:tcPr>
+                </a:tc>
+                <a:tc>
+                  <a:txBody>
+                    <a:bodyPr wrap="square"/>
+                    <a:lstStyle/>
+                    <a:p>
+                      <a:pPr algn="r"/>
+                      <a:r>
+                        <a:rPr sz="1200">
+                          <a:solidFill>
+                            <a:srgbClr val="E07A3D"/>
+                          </a:solidFill>
+                          <a:latin typeface="メイリオ"/>
+                        </a:rPr>
+                        <a:t>平均の約9倍まで</a:t>
+                      </a:r>
+                    </a:p>
+                  </a:txBody>
+                  <a:tcPr marL="45720" marR="45720" marT="18288" marB="18288" anchor="ctr">
+                    <a:solidFill>
+                      <a:srgbClr val="F4F7FB"/>
+                    </a:solidFill>
+                  </a:tcPr>
+                </a:tc>
+              </a:tr>
+              <a:tr h="320040">
+                <a:tc>
+                  <a:txBody>
+                    <a:bodyPr wrap="square"/>
+                    <a:lstStyle/>
+                    <a:p>
+                      <a:pPr algn="l"/>
+                      <a:r>
+                        <a:rPr sz="1100">
+                          <a:solidFill>
+                            <a:srgbClr val="1B3A4B"/>
+                          </a:solidFill>
+                          <a:latin typeface="メイリオ"/>
+                        </a:rPr>
+                        <a:t>1.5倍</a:t>
+                      </a:r>
+                    </a:p>
+                  </a:txBody>
+                  <a:tcPr marL="45720" marR="45720" marT="18288" marB="18288" anchor="ctr">
+                    <a:solidFill>
+                      <a:srgbClr val="FFFFFF"/>
+                    </a:solidFill>
+                  </a:tcPr>
+                </a:tc>
+                <a:tc>
+                  <a:txBody>
+                    <a:bodyPr wrap="square"/>
+                    <a:lstStyle/>
+                    <a:p>
+                      <a:pPr algn="r"/>
+                      <a:r>
+                        <a:rPr sz="1100">
+                          <a:solidFill>
+                            <a:srgbClr val="1B3A4B"/>
+                          </a:solidFill>
+                          <a:latin typeface="メイリオ"/>
+                        </a:rPr>
+                        <a:t>183</a:t>
+                      </a:r>
+                    </a:p>
+                  </a:txBody>
+                  <a:tcPr marL="45720" marR="45720" marT="18288" marB="18288" anchor="ctr">
+                    <a:solidFill>
+                      <a:srgbClr val="FFFFFF"/>
+                    </a:solidFill>
+                  </a:tcPr>
+                </a:tc>
+                <a:tc>
+                  <a:txBody>
+                    <a:bodyPr wrap="square"/>
+                    <a:lstStyle/>
+                    <a:p>
+                      <a:pPr algn="r"/>
+                      <a:r>
+                        <a:rPr sz="1100">
+                          <a:solidFill>
+                            <a:srgbClr val="1D7A70"/>
+                          </a:solidFill>
+                          <a:latin typeface="メイリオ"/>
+                        </a:rPr>
+                        <a:t>0.10</a:t>
+                      </a:r>
+                    </a:p>
+                  </a:txBody>
+                  <a:tcPr marL="45720" marR="45720" marT="18288" marB="18288" anchor="ctr">
+                    <a:solidFill>
+                      <a:srgbClr val="FFFFFF"/>
+                    </a:solidFill>
+                  </a:tcPr>
+                </a:tc>
+                <a:tc>
+                  <a:txBody>
+                    <a:bodyPr wrap="square"/>
+                    <a:lstStyle/>
+                    <a:p>
+                      <a:pPr algn="r"/>
+                      <a:r>
+                        <a:rPr sz="1100">
+                          <a:solidFill>
+                            <a:srgbClr val="1B3A4B"/>
+                          </a:solidFill>
+                          <a:latin typeface="メイリオ"/>
+                        </a:rPr>
+                        <a:t>1,331</a:t>
+                      </a:r>
+                    </a:p>
+                  </a:txBody>
+                  <a:tcPr marL="45720" marR="45720" marT="18288" marB="18288" anchor="ctr">
+                    <a:solidFill>
+                      <a:srgbClr val="FFFFFF"/>
+                    </a:solidFill>
+                  </a:tcPr>
+                </a:tc>
+                <a:tc>
+                  <a:txBody>
+                    <a:bodyPr wrap="square"/>
+                    <a:lstStyle/>
+                    <a:p>
+                      <a:pPr algn="r"/>
+                      <a:r>
+                        <a:rPr sz="1200">
+                          <a:solidFill>
+                            <a:srgbClr val="E07A3D"/>
+                          </a:solidFill>
+                          <a:latin typeface="メイリオ"/>
+                        </a:rPr>
+                        <a:t>平均の約7倍まで</a:t>
+                      </a:r>
+                    </a:p>
+                  </a:txBody>
+                  <a:tcPr marL="45720" marR="45720" marT="18288" marB="18288" anchor="ctr">
+                    <a:solidFill>
+                      <a:srgbClr val="FFFFFF"/>
+                    </a:solidFill>
+                  </a:tcPr>
+                </a:tc>
+              </a:tr>
+              <a:tr h="320040">
+                <a:tc>
+                  <a:txBody>
+                    <a:bodyPr wrap="square"/>
+                    <a:lstStyle/>
+                    <a:p>
+                      <a:pPr algn="l"/>
+                      <a:r>
+                        <a:rPr sz="1100">
+                          <a:solidFill>
+                            <a:srgbClr val="1B3A4B"/>
+                          </a:solidFill>
+                          <a:latin typeface="メイリオ"/>
+                        </a:rPr>
+                        <a:t>2倍</a:t>
+                      </a:r>
+                    </a:p>
+                  </a:txBody>
+                  <a:tcPr marL="45720" marR="45720" marT="18288" marB="18288" anchor="ctr">
+                    <a:solidFill>
+                      <a:srgbClr val="FFF4D6"/>
+                    </a:solidFill>
+                  </a:tcPr>
+                </a:tc>
+                <a:tc>
+                  <a:txBody>
+                    <a:bodyPr wrap="square"/>
+                    <a:lstStyle/>
+                    <a:p>
+                      <a:pPr algn="r"/>
+                      <a:r>
+                        <a:rPr sz="1100">
+                          <a:solidFill>
+                            <a:srgbClr val="1B3A4B"/>
+                          </a:solidFill>
+                          <a:latin typeface="メイリオ"/>
+                        </a:rPr>
+                        <a:t>244</a:t>
+                      </a:r>
+                    </a:p>
+                  </a:txBody>
+                  <a:tcPr marL="45720" marR="45720" marT="18288" marB="18288" anchor="ctr">
+                    <a:solidFill>
+                      <a:srgbClr val="FFF4D6"/>
+                    </a:solidFill>
+                  </a:tcPr>
+                </a:tc>
+                <a:tc>
+                  <a:txBody>
+                    <a:bodyPr wrap="square"/>
+                    <a:lstStyle/>
+                    <a:p>
+                      <a:pPr algn="r"/>
+                      <a:r>
+                        <a:rPr sz="1100">
+                          <a:solidFill>
+                            <a:srgbClr val="1D7A70"/>
+                          </a:solidFill>
+                          <a:latin typeface="メイリオ"/>
+                        </a:rPr>
+                        <a:t>0.14</a:t>
+                      </a:r>
+                    </a:p>
+                  </a:txBody>
+                  <a:tcPr marL="45720" marR="45720" marT="18288" marB="18288" anchor="ctr">
+                    <a:solidFill>
+                      <a:srgbClr val="FFF4D6"/>
+                    </a:solidFill>
+                  </a:tcPr>
+                </a:tc>
+                <a:tc>
+                  <a:txBody>
+                    <a:bodyPr wrap="square"/>
+                    <a:lstStyle/>
+                    <a:p>
+                      <a:pPr algn="r"/>
+                      <a:r>
+                        <a:rPr sz="1100">
+                          <a:solidFill>
+                            <a:srgbClr val="1B3A4B"/>
+                          </a:solidFill>
+                          <a:latin typeface="メイリオ"/>
+                        </a:rPr>
+                        <a:t>1,331</a:t>
+                      </a:r>
+                    </a:p>
+                  </a:txBody>
+                  <a:tcPr marL="45720" marR="45720" marT="18288" marB="18288" anchor="ctr">
+                    <a:solidFill>
+                      <a:srgbClr val="FFF4D6"/>
+                    </a:solidFill>
+                  </a:tcPr>
+                </a:tc>
+                <a:tc>
+                  <a:txBody>
+                    <a:bodyPr wrap="square"/>
+                    <a:lstStyle/>
+                    <a:p>
+                      <a:pPr algn="r"/>
+                      <a:r>
+                        <a:rPr sz="1200">
+                          <a:solidFill>
+                            <a:srgbClr val="E07A3D"/>
+                          </a:solidFill>
+                          <a:latin typeface="メイリオ"/>
+                        </a:rPr>
+                        <a:t>平均の約5倍まで</a:t>
+                      </a:r>
+                    </a:p>
+                  </a:txBody>
+                  <a:tcPr marL="45720" marR="45720" marT="18288" marB="18288" anchor="ctr">
+                    <a:solidFill>
+                      <a:srgbClr val="FFF4D6"/>
+                    </a:solidFill>
+                  </a:tcPr>
+                </a:tc>
+              </a:tr>
+            </a:tbl>
+          </a:graphicData>
+        </a:graphic>
+      </p:graphicFrame>
+      <p:sp>
+        <p:nvSpPr>
+          <p:cNvPr id="12" name="Rectangle 11"/>
+          <p:cNvSpPr/>
+          <p:nvPr/>
+        </p:nvSpPr>
+        <p:spPr>
+          <a:xfrm>
+            <a:off x="457200" y="5184648"/>
+            <a:ext cx="11384280" cy="320040"/>
+          </a:xfrm>
+          <a:prstGeom prst="rect">
+            <a:avLst/>
+          </a:prstGeom>
+          <a:noFill/>
+          <a:ln w="25400">
+            <a:solidFill>
+              <a:srgbClr val="C0392B"/>
+            </a:solidFill>
+          </a:ln>
+          <a:effectLst/>
+        </p:spPr>
+        <p:style>
+          <a:lnRef idx="1">
+            <a:schemeClr val="accent1"/>
+          </a:lnRef>
+          <a:fillRef idx="3">
+            <a:schemeClr val="accent1"/>
+          </a:fillRef>
+          <a:effectRef idx="2">
+            <a:schemeClr val="accent1"/>
+          </a:effectRef>
+          <a:fontRef idx="minor">
+            <a:schemeClr val="lt1"/>
+          </a:fontRef>
+        </p:style>
+        <p:txBody>
+          <a:bodyPr rtlCol="0" anchor="ctr"/>
+          <a:lstStyle/>
+          <a:p>
+            <a:pPr algn="ctr"/>
+          </a:p>
+        </p:txBody>
+      </p:sp>
+      <p:sp>
+        <p:nvSpPr>
+          <p:cNvPr id="13" name="Rectangle 12"/>
+          <p:cNvSpPr/>
+          <p:nvPr/>
+        </p:nvSpPr>
+        <p:spPr>
+          <a:xfrm>
+            <a:off x="457200" y="5715000"/>
+            <a:ext cx="11384280" cy="868680"/>
+          </a:xfrm>
+          <a:prstGeom prst="rect">
+            <a:avLst/>
+          </a:prstGeom>
+          <a:solidFill>
+            <a:srgbClr val="EAF0F6"/>
+          </a:solidFill>
+          <a:ln w="19050">
+            <a:solidFill>
+              <a:srgbClr val="3D5A80"/>
+            </a:solidFill>
+          </a:ln>
+          <a:effectLst/>
+        </p:spPr>
+        <p:style>
+          <a:lnRef idx="1">
+            <a:schemeClr val="accent1"/>
+          </a:lnRef>
+          <a:fillRef idx="3">
+            <a:schemeClr val="accent1"/>
+          </a:fillRef>
+          <a:effectRef idx="2">
+            <a:schemeClr val="accent1"/>
+          </a:effectRef>
+          <a:fontRef idx="minor">
+            <a:schemeClr val="lt1"/>
+          </a:fontRef>
+        </p:style>
+        <p:txBody>
+          <a:bodyPr rtlCol="0" anchor="ctr"/>
+          <a:lstStyle/>
+          <a:p>
+            <a:pPr algn="ctr"/>
+          </a:p>
+        </p:txBody>
+      </p:sp>
+      <p:sp>
+        <p:nvSpPr>
+          <p:cNvPr id="14" name="TextBox 13"/>
+          <p:cNvSpPr txBox="1"/>
+          <p:nvPr/>
+        </p:nvSpPr>
+        <p:spPr>
+          <a:xfrm>
+            <a:off x="713232" y="5870448"/>
+            <a:ext cx="10881360" cy="640080"/>
+          </a:xfrm>
+          <a:prstGeom prst="rect">
+            <a:avLst/>
+          </a:prstGeom>
+          <a:noFill/>
+        </p:spPr>
+        <p:txBody>
+          <a:bodyPr wrap="square" lIns="0" tIns="0" rIns="0" bIns="0">
+            <a:spAutoFit/>
+          </a:bodyPr>
+          <a:lstStyle/>
+          <a:p>
+            <a:pPr algn="l"/>
+            <a:r>
+              <a:rPr sz="1200">
+                <a:solidFill>
+                  <a:srgbClr val="2B4060"/>
+                </a:solidFill>
+                <a:latin typeface="メイリオ"/>
+              </a:rPr>
+              <a:t>【ご確認事項】　ピーク時間帯・繁忙日の偏りが平均の5倍を超える見込みがある場合はご提示ください。</a:t>
+            </a:r>
+          </a:p>
+          <a:p>
+            <a:pPr algn="l"/>
+            <a:r>
+              <a:rPr sz="1200">
+                <a:solidFill>
+                  <a:srgbClr val="2B4060"/>
+                </a:solidFill>
+                <a:latin typeface="メイリオ"/>
+              </a:rPr>
+              <a:t>　　　　　　　　該当する実績（日次の注文件数、時間帯別の注文件数）をいただければ、上表の境目に対して再評価します。</a:t>
             </a:r>
           </a:p>
         </p:txBody>
